--- a/Quadro_Aulas_Report_2026-06-08.pptx
+++ b/Quadro_Aulas_Report_2026-06-08.pptx
@@ -1038,7 +1038,7 @@
                   <a:srgbClr val="8FA3C0"/>
                 </a:solidFill>
               </a:rPr>
-              <a:t>8 de Junho de 2026 as 09:08</a:t>
+              <a:t>8 de Junho de 2026 as 09:09</a:t>
             </a:r>
             <a:endParaRPr lang="en-US" sz="700" dirty="0"/>
           </a:p>

--- a/Quadro_Aulas_Report_2026-06-08.pptx
+++ b/Quadro_Aulas_Report_2026-06-08.pptx
@@ -1038,7 +1038,7 @@
                   <a:srgbClr val="8FA3C0"/>
                 </a:solidFill>
               </a:rPr>
-              <a:t>8 de Junho de 2026 as 09:09</a:t>
+              <a:t>8 de Junho de 2026 as 18:51</a:t>
             </a:r>
             <a:endParaRPr lang="en-US" sz="700" dirty="0"/>
           </a:p>
@@ -1207,7 +1207,7 @@
                   <a:srgbClr val="4ADE80"/>
                 </a:solidFill>
               </a:rPr>
-              <a:t>244</a:t>
+              <a:t>246</a:t>
             </a:r>
             <a:endParaRPr lang="en-US" sz="2400" dirty="0"/>
           </a:p>
@@ -1351,7 +1351,7 @@
                   <a:srgbClr val="F87171"/>
                 </a:solidFill>
               </a:rPr>
-              <a:t>89</a:t>
+              <a:t>87</a:t>
             </a:r>
             <a:endParaRPr lang="en-US" sz="2400" dirty="0"/>
           </a:p>
@@ -1427,7 +1427,7 @@
         <p:spPr>
           <a:xfrm>
             <a:off x="137160" y="3538728"/>
-            <a:ext cx="1399032" cy="91440"/>
+            <a:ext cx="1419606" cy="91440"/>
           </a:xfrm>
           <a:prstGeom prst="rect">
             <a:avLst/>
@@ -1473,7 +1473,7 @@
                   <a:srgbClr val="8FA3C0"/>
                 </a:solidFill>
               </a:rPr>
-              <a:t>68% concluido  .  244 de 358 itens</a:t>
+              <a:t>69% concluido  .  246 de 358 itens</a:t>
             </a:r>
             <a:endParaRPr lang="en-US" sz="700" dirty="0"/>
           </a:p>
@@ -1818,7 +1818,7 @@
                   <a:srgbClr val="222222"/>
                 </a:solidFill>
               </a:rPr>
-              <a:t>5 Stories · 4 NFT · 59 itens</a:t>
+              <a:t>5 Stories · 3 NFT · 59 itens</a:t>
             </a:r>
             <a:endParaRPr lang="en-US" sz="750" dirty="0"/>
           </a:p>
@@ -1930,7 +1930,7 @@
         <p:spPr>
           <a:xfrm>
             <a:off x="2514600" y="859536"/>
-            <a:ext cx="1718889" cy="50292"/>
+            <a:ext cx="1939260" cy="50292"/>
           </a:xfrm>
           <a:prstGeom prst="rect">
             <a:avLst/>
@@ -1976,7 +1976,7 @@
                   <a:srgbClr val="888888"/>
                 </a:solidFill>
               </a:rPr>
-              <a:t>Stories/NFTs: 78% · 7 de 9</a:t>
+              <a:t>Stories/NFTs: 88% · 7 de 8</a:t>
             </a:r>
             <a:endParaRPr lang="en-US" sz="650" dirty="0"/>
           </a:p>
@@ -2263,7 +2263,7 @@
                   <a:srgbClr val="222222"/>
                 </a:solidFill>
               </a:rPr>
-              <a:t>A Fazer: 14 . Em progresso: 3 . Finalizados: 82</a:t>
+              <a:t>A Fazer: 13 . Em progresso: 3 . Finalizados: 83</a:t>
             </a:r>
             <a:endParaRPr lang="en-US" sz="750" dirty="0"/>
           </a:p>
@@ -2299,7 +2299,7 @@
                   <a:srgbClr val="222222"/>
                 </a:solidFill>
               </a:rPr>
-              <a:t>Est: 397h . Real: 436.4h . Rem: 28.3h</a:t>
+              <a:t>Est: 397h . Real: 436.4h . Rem: 23.5h</a:t>
             </a:r>
             <a:endParaRPr lang="en-US" sz="750" dirty="0"/>
           </a:p>
@@ -2425,7 +2425,7 @@
         <p:spPr>
           <a:xfrm>
             <a:off x="4946904" y="1033272"/>
-            <a:ext cx="1829074" cy="50292"/>
+            <a:ext cx="1851111" cy="50292"/>
           </a:xfrm>
           <a:prstGeom prst="rect">
             <a:avLst/>
@@ -2471,7 +2471,7 @@
                   <a:srgbClr val="888888"/>
                 </a:solidFill>
               </a:rPr>
-              <a:t>Subs: 83% · 82 de 99</a:t>
+              <a:t>Subs: 84% · 83 de 99</a:t>
             </a:r>
             <a:endParaRPr lang="en-US" sz="650" dirty="0"/>
           </a:p>
@@ -2507,7 +2507,7 @@
                   <a:srgbClr val="D97706"/>
                 </a:solidFill>
               </a:rPr>
-              <a:t>Projetado: 464.7h (+67.7h / +17%)</a:t>
+              <a:t>Projetado: 459.9h (+62.9h / +16%)</a:t>
             </a:r>
             <a:endParaRPr lang="en-US" sz="800" dirty="0"/>
           </a:p>
@@ -3537,7 +3537,7 @@
                   <a:srgbClr val="222222"/>
                 </a:solidFill>
               </a:rPr>
-              <a:t>1202.5h</a:t>
+              <a:t>1207.5h</a:t>
             </a:r>
             <a:endParaRPr lang="en-US" sz="2400" dirty="0"/>
           </a:p>
@@ -3670,7 +3670,7 @@
                   <a:srgbClr val="D97706"/>
                 </a:solidFill>
               </a:rPr>
-              <a:t>1035.5h</a:t>
+              <a:t>1039.5h</a:t>
             </a:r>
             <a:endParaRPr lang="en-US" sz="2400" dirty="0"/>
           </a:p>
@@ -3803,7 +3803,7 @@
                   <a:srgbClr val="F87171"/>
                 </a:solidFill>
               </a:rPr>
-              <a:t>347.3h</a:t>
+              <a:t>342.5h</a:t>
             </a:r>
             <a:endParaRPr lang="en-US" sz="2400" dirty="0"/>
           </a:p>
@@ -3936,7 +3936,7 @@
                   <a:srgbClr val="D97706"/>
                 </a:solidFill>
               </a:rPr>
-              <a:t>+180.3h</a:t>
+              <a:t>+174.5h</a:t>
             </a:r>
             <a:endParaRPr lang="en-US" sz="2400" dirty="0"/>
           </a:p>
@@ -3972,7 +3972,7 @@
                   <a:srgbClr val="888888"/>
                 </a:solidFill>
               </a:rPr>
-              <a:t>projetado: 1382.8h (+15%)</a:t>
+              <a:t>projetado: 1382h (+14%)</a:t>
             </a:r>
             <a:endParaRPr lang="en-US" sz="700" dirty="0"/>
           </a:p>
@@ -3987,7 +3987,7 @@
         <p:spPr>
           <a:xfrm>
             <a:off x="2441448" y="2916936"/>
-            <a:ext cx="7224028" cy="54864"/>
+            <a:ext cx="7256131" cy="54864"/>
           </a:xfrm>
           <a:prstGeom prst="rect">
             <a:avLst/>
@@ -4011,8 +4011,8 @@
         </p:nvSpPr>
         <p:spPr>
           <a:xfrm>
-            <a:off x="9665476" y="2916936"/>
-            <a:ext cx="2422892" cy="54864"/>
+            <a:off x="9697579" y="2916936"/>
+            <a:ext cx="2390789" cy="54864"/>
           </a:xfrm>
           <a:prstGeom prst="rect">
             <a:avLst/>
@@ -5070,7 +5070,7 @@
                   <a:srgbClr val="D85A30"/>
                 </a:solidFill>
               </a:rPr>
-              <a:t>20.0%</a:t>
+              <a:t>19.9%</a:t>
             </a:r>
             <a:endParaRPr lang="en-US" sz="2200" dirty="0"/>
           </a:p>
@@ -5336,7 +5336,7 @@
                   <a:srgbClr val="1D9E75"/>
                 </a:solidFill>
               </a:rPr>
-              <a:t>80.0%</a:t>
+              <a:t>80.1%</a:t>
             </a:r>
             <a:endParaRPr lang="en-US" sz="2200" dirty="0"/>
           </a:p>
@@ -5573,7 +5573,7 @@
                   <a:srgbClr val="FFFFFF"/>
                 </a:solidFill>
               </a:rPr>
-              <a:t>2</a:t>
+              <a:t>1</a:t>
             </a:r>
             <a:endParaRPr lang="en-US" sz="650" dirty="0"/>
           </a:p>
@@ -5587,7 +5587,7 @@
                   <a:srgbClr val="FFFFFF"/>
                 </a:solidFill>
               </a:rPr>
-              <a:t>stories</a:t>
+              <a:t>story</a:t>
             </a:r>
             <a:endParaRPr lang="en-US" sz="650" dirty="0"/>
           </a:p>
@@ -5623,7 +5623,7 @@
                   <a:srgbClr val="222222"/>
                 </a:solidFill>
               </a:rPr>
-              <a:t>2 stories sem subtarefas</a:t>
+              <a:t>1 story sem subtarefas</a:t>
             </a:r>
             <a:endParaRPr lang="en-US" sz="750" dirty="0"/>
           </a:p>
@@ -5659,7 +5659,7 @@
                   <a:srgbClr val="222222"/>
                 </a:solidFill>
               </a:rPr>
-              <a:t>Redundante · Principal</a:t>
+              <a:t>Redundante</a:t>
             </a:r>
             <a:endParaRPr lang="en-US" sz="750" dirty="0"/>
           </a:p>
@@ -6526,7 +6526,7 @@
         <p:spPr>
           <a:xfrm>
             <a:off x="2496312" y="6153912"/>
-            <a:ext cx="1170193" cy="73152"/>
+            <a:ext cx="1163942" cy="73152"/>
           </a:xfrm>
           <a:prstGeom prst="rect">
             <a:avLst/>
@@ -6572,7 +6572,7 @@
                   <a:srgbClr val="1D9E75"/>
                 </a:solidFill>
               </a:rPr>
-              <a:t>160.7h · 32 subs finalizadas</a:t>
+              <a:t>164.7h · 33 subs finalizadas</a:t>
             </a:r>
             <a:endParaRPr lang="en-US" sz="950" dirty="0"/>
           </a:p>
@@ -6608,7 +6608,7 @@
                   <a:srgbClr val="888888"/>
                 </a:solidFill>
               </a:rPr>
-              <a:t>164.5h estimadas</a:t>
+              <a:t>169.5h estimadas</a:t>
             </a:r>
             <a:endParaRPr lang="en-US" sz="850" dirty="0"/>
           </a:p>
@@ -6952,7 +6952,7 @@
                   <a:srgbClr val="D97706"/>
                 </a:solidFill>
               </a:rPr>
-              <a:t>237.7h · 29 subs finalizadas</a:t>
+              <a:t>237.7h · 30 subs finalizadas</a:t>
             </a:r>
             <a:endParaRPr lang="en-US" sz="950" dirty="0"/>
           </a:p>
@@ -6988,7 +6988,7 @@
                   <a:srgbClr val="888888"/>
                 </a:solidFill>
               </a:rPr>
-              <a:t>206h estimadas</a:t>
+              <a:t>214h estimadas</a:t>
             </a:r>
             <a:endParaRPr lang="en-US" sz="850" dirty="0"/>
           </a:p>

--- a/Quadro_Aulas_Report_2026-06-08.pptx
+++ b/Quadro_Aulas_Report_2026-06-08.pptx
@@ -1038,7 +1038,7 @@
                   <a:srgbClr val="8FA3C0"/>
                 </a:solidFill>
               </a:rPr>
-              <a:t>8 de Junho de 2026 as 18:51</a:t>
+              <a:t>8 de Junho de 2026 as 21:52</a:t>
             </a:r>
             <a:endParaRPr lang="en-US" sz="700" dirty="0"/>
           </a:p>
@@ -2299,7 +2299,7 @@
                   <a:srgbClr val="222222"/>
                 </a:solidFill>
               </a:rPr>
-              <a:t>Est: 397h . Real: 436.4h . Rem: 23.5h</a:t>
+              <a:t>Est: 397h . Real: 439.4h . Rem: 23.5h</a:t>
             </a:r>
             <a:endParaRPr lang="en-US" sz="750" dirty="0"/>
           </a:p>
@@ -2507,7 +2507,7 @@
                   <a:srgbClr val="D97706"/>
                 </a:solidFill>
               </a:rPr>
-              <a:t>Projetado: 459.9h (+62.9h / +16%)</a:t>
+              <a:t>Projetado: 462.9h (+65.9h / +17%)</a:t>
             </a:r>
             <a:endParaRPr lang="en-US" sz="800" dirty="0"/>
           </a:p>
@@ -3670,7 +3670,7 @@
                   <a:srgbClr val="D97706"/>
                 </a:solidFill>
               </a:rPr>
-              <a:t>1039.5h</a:t>
+              <a:t>1042.5h</a:t>
             </a:r>
             <a:endParaRPr lang="en-US" sz="2400" dirty="0"/>
           </a:p>
@@ -3936,7 +3936,7 @@
                   <a:srgbClr val="D97706"/>
                 </a:solidFill>
               </a:rPr>
-              <a:t>+174.5h</a:t>
+              <a:t>+177.5h</a:t>
             </a:r>
             <a:endParaRPr lang="en-US" sz="2400" dirty="0"/>
           </a:p>
@@ -3972,7 +3972,7 @@
                   <a:srgbClr val="888888"/>
                 </a:solidFill>
               </a:rPr>
-              <a:t>projetado: 1382h (+14%)</a:t>
+              <a:t>projetado: 1385h (+15%)</a:t>
             </a:r>
             <a:endParaRPr lang="en-US" sz="700" dirty="0"/>
           </a:p>
@@ -3987,7 +3987,7 @@
         <p:spPr>
           <a:xfrm>
             <a:off x="2441448" y="2916936"/>
-            <a:ext cx="7256131" cy="54864"/>
+            <a:ext cx="7261310" cy="54864"/>
           </a:xfrm>
           <a:prstGeom prst="rect">
             <a:avLst/>
@@ -4011,8 +4011,8 @@
         </p:nvSpPr>
         <p:spPr>
           <a:xfrm>
-            <a:off x="9697579" y="2916936"/>
-            <a:ext cx="2390789" cy="54864"/>
+            <a:off x="9702758" y="2916936"/>
+            <a:ext cx="2385610" cy="54864"/>
           </a:xfrm>
           <a:prstGeom prst="rect">
             <a:avLst/>
@@ -6952,7 +6952,7 @@
                   <a:srgbClr val="D97706"/>
                 </a:solidFill>
               </a:rPr>
-              <a:t>237.7h · 30 subs finalizadas</a:t>
+              <a:t>240.7h · 30 subs finalizadas</a:t>
             </a:r>
             <a:endParaRPr lang="en-US" sz="950" dirty="0"/>
           </a:p>

--- a/Quadro_Aulas_Report_2026-06-08.pptx
+++ b/Quadro_Aulas_Report_2026-06-08.pptx
@@ -1038,7 +1038,7 @@
                   <a:srgbClr val="8FA3C0"/>
                 </a:solidFill>
               </a:rPr>
-              <a:t>8 de Junho de 2026 as 21:52</a:t>
+              <a:t>8 de Junho de 2026 as 22:00</a:t>
             </a:r>
             <a:endParaRPr lang="en-US" sz="700" dirty="0"/>
           </a:p>
@@ -1818,7 +1818,7 @@
                   <a:srgbClr val="222222"/>
                 </a:solidFill>
               </a:rPr>
-              <a:t>5 Stories · 3 NFT · 59 itens</a:t>
+              <a:t>5 Stories · 3 NFT · 69 itens</a:t>
             </a:r>
             <a:endParaRPr lang="en-US" sz="750" dirty="0"/>
           </a:p>
@@ -1854,7 +1854,7 @@
                   <a:srgbClr val="222222"/>
                 </a:solidFill>
               </a:rPr>
-              <a:t>A Fazer: 0 . Em progresso: 0 . Finalizados: 59</a:t>
+              <a:t>A Fazer: 10 . Em progresso: 0 . Finalizados: 59</a:t>
             </a:r>
             <a:endParaRPr lang="en-US" sz="750" dirty="0"/>
           </a:p>
@@ -1890,7 +1890,7 @@
                   <a:srgbClr val="222222"/>
                 </a:solidFill>
               </a:rPr>
-              <a:t>Est: 237.5h . Real: 240.2h . Rem: 0h</a:t>
+              <a:t>Est: 274h . Real: 240.2h . Rem: 36.5h</a:t>
             </a:r>
             <a:endParaRPr lang="en-US" sz="750" dirty="0"/>
           </a:p>
@@ -2016,7 +2016,7 @@
         <p:spPr>
           <a:xfrm>
             <a:off x="2514600" y="1033272"/>
-            <a:ext cx="2203704" cy="50292"/>
+            <a:ext cx="1895185" cy="50292"/>
           </a:xfrm>
           <a:prstGeom prst="rect">
             <a:avLst/>
@@ -2062,7 +2062,7 @@
                   <a:srgbClr val="888888"/>
                 </a:solidFill>
               </a:rPr>
-              <a:t>Subs: 100% · 59 de 59</a:t>
+              <a:t>Subs: 86% · 59 de 69</a:t>
             </a:r>
             <a:endParaRPr lang="en-US" sz="650" dirty="0"/>
           </a:p>
@@ -2098,7 +2098,7 @@
                   <a:srgbClr val="1D9E75"/>
                 </a:solidFill>
               </a:rPr>
-              <a:t>Projetado: 240.2h (+2.7h / +1%)</a:t>
+              <a:t>Projetado: 276.7h (+2.7h / +1%)</a:t>
             </a:r>
             <a:endParaRPr lang="en-US" sz="800" dirty="0"/>
           </a:p>
@@ -2227,7 +2227,7 @@
                   <a:srgbClr val="222222"/>
                 </a:solidFill>
               </a:rPr>
-              <a:t>7 Stories · 3 NFT · 99 itens</a:t>
+              <a:t>7 Stories · 3 NFT · 101 itens</a:t>
             </a:r>
             <a:endParaRPr lang="en-US" sz="750" dirty="0"/>
           </a:p>
@@ -2263,7 +2263,7 @@
                   <a:srgbClr val="222222"/>
                 </a:solidFill>
               </a:rPr>
-              <a:t>A Fazer: 13 . Em progresso: 3 . Finalizados: 83</a:t>
+              <a:t>A Fazer: 13 . Em progresso: 3 . Finalizados: 85</a:t>
             </a:r>
             <a:endParaRPr lang="en-US" sz="750" dirty="0"/>
           </a:p>
@@ -2299,7 +2299,7 @@
                   <a:srgbClr val="222222"/>
                 </a:solidFill>
               </a:rPr>
-              <a:t>Est: 397h . Real: 439.4h . Rem: 23.5h</a:t>
+              <a:t>Est: 402h . Real: 450.4h . Rem: 23.5h</a:t>
             </a:r>
             <a:endParaRPr lang="en-US" sz="750" dirty="0"/>
           </a:p>
@@ -2471,7 +2471,7 @@
                   <a:srgbClr val="888888"/>
                 </a:solidFill>
               </a:rPr>
-              <a:t>Subs: 84% · 83 de 99</a:t>
+              <a:t>Subs: 84% · 85 de 101</a:t>
             </a:r>
             <a:endParaRPr lang="en-US" sz="650" dirty="0"/>
           </a:p>
@@ -2507,7 +2507,7 @@
                   <a:srgbClr val="D97706"/>
                 </a:solidFill>
               </a:rPr>
-              <a:t>Projetado: 462.9h (+65.9h / +17%)</a:t>
+              <a:t>Projetado: 473.9h (+71.9h / +18%)</a:t>
             </a:r>
             <a:endParaRPr lang="en-US" sz="800" dirty="0"/>
           </a:p>
@@ -4153,7 +4153,7 @@
                   <a:srgbClr val="0F6E56"/>
                 </a:solidFill>
               </a:rPr>
-              <a:t>90% concluido</a:t>
+              <a:t>85% concluido</a:t>
             </a:r>
             <a:endParaRPr lang="en-US" sz="650" dirty="0"/>
           </a:p>
@@ -4193,7 +4193,7 @@
         <p:spPr>
           <a:xfrm>
             <a:off x="2551176" y="3291840"/>
-            <a:ext cx="4102456" cy="64008"/>
+            <a:ext cx="3874541" cy="64008"/>
           </a:xfrm>
           <a:prstGeom prst="rect">
             <a:avLst/>
@@ -6296,7 +6296,7 @@
                   <a:srgbClr val="222222"/>
                 </a:solidFill>
               </a:rPr>
-              <a:t>Princ +18h · Redund +133h · Obs +9h</a:t>
+              <a:t>Princ +55h · Redund +138h · Obs +9h</a:t>
             </a:r>
             <a:endParaRPr lang="en-US" sz="750" dirty="0"/>
           </a:p>
